--- a/media/resources/files/BaardykAmaldar1234_RbaXBpG.pptx
+++ b/media/resources/files/BaardykAmaldar1234_RbaXBpG.pptx
@@ -5339,7 +5339,7 @@
             </a:pPr>
             <a:r>
               <a:rPr lang="ru-RU" sz="2800" dirty="0"/>
-              <a:t>Турдуу пикирлер учун ыраазычылык билдиребиз.</a:t>
+              <a:t>Түрдүү пикирлер үчүн ыраазычылык билдиребиз.</a:t>
             </a:r>
           </a:p>
           <a:p>

--- a/media/resources/files/BaardykAmaldar1234_RbaXBpG.pptx
+++ b/media/resources/files/BaardykAmaldar1234_RbaXBpG.pptx
@@ -1424,7 +1424,7 @@
                 </a:solidFill>
                 <a:latin typeface="Calibri" panose="020F0502020204030204"/>
               </a:rPr>
-              <a:t>Баардык </a:t>
+              <a:t>Бардык </a:t>
             </a:r>
             <a:r>
               <a:rPr lang="ru-RU" dirty="0">
